--- a/ligacaoLilygo.pptx
+++ b/ligacaoLilygo.pptx
@@ -297,7 +297,7 @@
             <a:fld id="{5C61F3A0-9D7B-47C1-AB17-B21DB3AD0D97}" type="datetimeFigureOut">
               <a:rPr lang="pt-BR" smtClean="0"/>
               <a:pPr/>
-              <a:t>26/04/2026</a:t>
+              <a:t>23/05/2026</a:t>
             </a:fld>
             <a:endParaRPr lang="pt-BR"/>
           </a:p>
@@ -464,7 +464,7 @@
             <a:fld id="{5C61F3A0-9D7B-47C1-AB17-B21DB3AD0D97}" type="datetimeFigureOut">
               <a:rPr lang="pt-BR" smtClean="0"/>
               <a:pPr/>
-              <a:t>26/04/2026</a:t>
+              <a:t>23/05/2026</a:t>
             </a:fld>
             <a:endParaRPr lang="pt-BR"/>
           </a:p>
@@ -641,7 +641,7 @@
             <a:fld id="{5C61F3A0-9D7B-47C1-AB17-B21DB3AD0D97}" type="datetimeFigureOut">
               <a:rPr lang="pt-BR" smtClean="0"/>
               <a:pPr/>
-              <a:t>26/04/2026</a:t>
+              <a:t>23/05/2026</a:t>
             </a:fld>
             <a:endParaRPr lang="pt-BR"/>
           </a:p>
@@ -808,7 +808,7 @@
             <a:fld id="{5C61F3A0-9D7B-47C1-AB17-B21DB3AD0D97}" type="datetimeFigureOut">
               <a:rPr lang="pt-BR" smtClean="0"/>
               <a:pPr/>
-              <a:t>26/04/2026</a:t>
+              <a:t>23/05/2026</a:t>
             </a:fld>
             <a:endParaRPr lang="pt-BR"/>
           </a:p>
@@ -1051,7 +1051,7 @@
             <a:fld id="{5C61F3A0-9D7B-47C1-AB17-B21DB3AD0D97}" type="datetimeFigureOut">
               <a:rPr lang="pt-BR" smtClean="0"/>
               <a:pPr/>
-              <a:t>26/04/2026</a:t>
+              <a:t>23/05/2026</a:t>
             </a:fld>
             <a:endParaRPr lang="pt-BR"/>
           </a:p>
@@ -1336,7 +1336,7 @@
             <a:fld id="{5C61F3A0-9D7B-47C1-AB17-B21DB3AD0D97}" type="datetimeFigureOut">
               <a:rPr lang="pt-BR" smtClean="0"/>
               <a:pPr/>
-              <a:t>26/04/2026</a:t>
+              <a:t>23/05/2026</a:t>
             </a:fld>
             <a:endParaRPr lang="pt-BR"/>
           </a:p>
@@ -1755,7 +1755,7 @@
             <a:fld id="{5C61F3A0-9D7B-47C1-AB17-B21DB3AD0D97}" type="datetimeFigureOut">
               <a:rPr lang="pt-BR" smtClean="0"/>
               <a:pPr/>
-              <a:t>26/04/2026</a:t>
+              <a:t>23/05/2026</a:t>
             </a:fld>
             <a:endParaRPr lang="pt-BR"/>
           </a:p>
@@ -1870,7 +1870,7 @@
             <a:fld id="{5C61F3A0-9D7B-47C1-AB17-B21DB3AD0D97}" type="datetimeFigureOut">
               <a:rPr lang="pt-BR" smtClean="0"/>
               <a:pPr/>
-              <a:t>26/04/2026</a:t>
+              <a:t>23/05/2026</a:t>
             </a:fld>
             <a:endParaRPr lang="pt-BR"/>
           </a:p>
@@ -1962,7 +1962,7 @@
             <a:fld id="{5C61F3A0-9D7B-47C1-AB17-B21DB3AD0D97}" type="datetimeFigureOut">
               <a:rPr lang="pt-BR" smtClean="0"/>
               <a:pPr/>
-              <a:t>26/04/2026</a:t>
+              <a:t>23/05/2026</a:t>
             </a:fld>
             <a:endParaRPr lang="pt-BR"/>
           </a:p>
@@ -2236,7 +2236,7 @@
             <a:fld id="{5C61F3A0-9D7B-47C1-AB17-B21DB3AD0D97}" type="datetimeFigureOut">
               <a:rPr lang="pt-BR" smtClean="0"/>
               <a:pPr/>
-              <a:t>26/04/2026</a:t>
+              <a:t>23/05/2026</a:t>
             </a:fld>
             <a:endParaRPr lang="pt-BR"/>
           </a:p>
@@ -2486,7 +2486,7 @@
             <a:fld id="{5C61F3A0-9D7B-47C1-AB17-B21DB3AD0D97}" type="datetimeFigureOut">
               <a:rPr lang="pt-BR" smtClean="0"/>
               <a:pPr/>
-              <a:t>26/04/2026</a:t>
+              <a:t>23/05/2026</a:t>
             </a:fld>
             <a:endParaRPr lang="pt-BR"/>
           </a:p>
@@ -2696,7 +2696,7 @@
             <a:fld id="{5C61F3A0-9D7B-47C1-AB17-B21DB3AD0D97}" type="datetimeFigureOut">
               <a:rPr lang="pt-BR" smtClean="0"/>
               <a:pPr/>
-              <a:t>26/04/2026</a:t>
+              <a:t>23/05/2026</a:t>
             </a:fld>
             <a:endParaRPr lang="pt-BR"/>
           </a:p>
@@ -8846,8 +8846,8 @@
           </a:stretch>
         </p:blipFill>
         <p:spPr bwMode="auto">
-          <a:xfrm rot="5584415">
-            <a:off x="6784754" y="340612"/>
+          <a:xfrm rot="11055759">
+            <a:off x="7704985" y="378948"/>
             <a:ext cx="1284054" cy="1033688"/>
           </a:xfrm>
           <a:prstGeom prst="rect">
@@ -8873,7 +8873,7 @@
         </p:blipFill>
         <p:spPr bwMode="auto">
           <a:xfrm rot="3564559">
-            <a:off x="7555882" y="1599992"/>
+            <a:off x="7555883" y="1828763"/>
             <a:ext cx="1529795" cy="1280655"/>
           </a:xfrm>
           <a:prstGeom prst="rect">
@@ -9625,12 +9625,12 @@
         </p:nvCxnSpPr>
         <p:spPr>
           <a:xfrm rot="16200000" flipH="1">
-            <a:off x="7668344" y="908720"/>
-            <a:ext cx="936104" cy="648072"/>
+            <a:off x="8094042" y="1563142"/>
+            <a:ext cx="654422" cy="65658"/>
           </a:xfrm>
           <a:prstGeom prst="bentConnector3">
             <a:avLst>
-              <a:gd name="adj1" fmla="val -113"/>
+              <a:gd name="adj1" fmla="val 50000"/>
             </a:avLst>
           </a:prstGeom>
           <a:ln w="22225">
@@ -9657,18 +9657,18 @@
       <p:cxnSp>
         <p:nvCxnSpPr>
           <p:cNvPr id="90" name="Conector angulado 89"/>
-          <p:cNvCxnSpPr>
-            <a:endCxn id="78" idx="0"/>
-          </p:cNvCxnSpPr>
+          <p:cNvCxnSpPr/>
           <p:nvPr/>
         </p:nvCxnSpPr>
         <p:spPr>
           <a:xfrm rot="16200000" flipV="1">
-            <a:off x="7325785" y="1502265"/>
-            <a:ext cx="2111784" cy="877590"/>
-          </a:xfrm>
-          <a:prstGeom prst="bentConnector2">
-            <a:avLst/>
+            <a:off x="7812361" y="1988840"/>
+            <a:ext cx="1512168" cy="504055"/>
+          </a:xfrm>
+          <a:prstGeom prst="bentConnector3">
+            <a:avLst>
+              <a:gd name="adj1" fmla="val 83713"/>
+            </a:avLst>
           </a:prstGeom>
           <a:ln w="22225">
             <a:solidFill>
@@ -10844,7 +10844,7 @@
         </p:nvSpPr>
         <p:spPr>
           <a:xfrm>
-            <a:off x="6588224" y="2924944"/>
+            <a:off x="6948264" y="2780928"/>
             <a:ext cx="540533" cy="307777"/>
           </a:xfrm>
           <a:prstGeom prst="rect">
@@ -11099,7 +11099,7 @@
         </p:nvSpPr>
         <p:spPr>
           <a:xfrm>
-            <a:off x="6372200" y="1340768"/>
+            <a:off x="6660232" y="0"/>
             <a:ext cx="981487" cy="307777"/>
           </a:xfrm>
           <a:prstGeom prst="rect">
@@ -11358,6 +11358,289 @@
           <a:ln w="22225">
             <a:solidFill>
               <a:schemeClr val="tx1"/>
+            </a:solidFill>
+          </a:ln>
+        </p:spPr>
+        <p:style>
+          <a:lnRef idx="1">
+            <a:schemeClr val="accent1"/>
+          </a:lnRef>
+          <a:fillRef idx="0">
+            <a:schemeClr val="accent1"/>
+          </a:fillRef>
+          <a:effectRef idx="0">
+            <a:schemeClr val="accent1"/>
+          </a:effectRef>
+          <a:fontRef idx="minor">
+            <a:schemeClr val="tx1"/>
+          </a:fontRef>
+        </p:style>
+      </p:cxnSp>
+      <p:pic>
+        <p:nvPicPr>
+          <p:cNvPr id="73" name="Picture 6"/>
+          <p:cNvPicPr>
+            <a:picLocks noChangeAspect="1" noChangeArrowheads="1"/>
+          </p:cNvPicPr>
+          <p:nvPr/>
+        </p:nvPicPr>
+        <p:blipFill>
+          <a:blip r:embed="rId9" cstate="print"/>
+          <a:srcRect/>
+          <a:stretch>
+            <a:fillRect/>
+          </a:stretch>
+        </p:blipFill>
+        <p:spPr bwMode="auto">
+          <a:xfrm>
+            <a:off x="6732240" y="332656"/>
+            <a:ext cx="893038" cy="1174626"/>
+          </a:xfrm>
+          <a:prstGeom prst="rect">
+            <a:avLst/>
+          </a:prstGeom>
+          <a:noFill/>
+          <a:ln w="9525">
+            <a:noFill/>
+            <a:miter lim="800000"/>
+            <a:headEnd/>
+            <a:tailEnd/>
+          </a:ln>
+        </p:spPr>
+      </p:pic>
+      <p:sp>
+        <p:nvSpPr>
+          <p:cNvPr id="87" name="Retângulo 86"/>
+          <p:cNvSpPr/>
+          <p:nvPr/>
+        </p:nvSpPr>
+        <p:spPr>
+          <a:xfrm>
+            <a:off x="6804248" y="1412776"/>
+            <a:ext cx="540533" cy="307777"/>
+          </a:xfrm>
+          <a:prstGeom prst="rect">
+            <a:avLst/>
+          </a:prstGeom>
+        </p:spPr>
+        <p:txBody>
+          <a:bodyPr wrap="none">
+            <a:spAutoFit/>
+          </a:bodyPr>
+          <a:lstStyle/>
+          <a:p>
+            <a:r>
+              <a:rPr lang="pt-BR" sz="1400" b="1" dirty="0" smtClean="0"/>
+              <a:t>0x69</a:t>
+            </a:r>
+            <a:endParaRPr lang="pt-BR" sz="1400" dirty="0"/>
+          </a:p>
+        </p:txBody>
+      </p:sp>
+      <p:cxnSp>
+        <p:nvCxnSpPr>
+          <p:cNvPr id="89" name="Conector reto 88"/>
+          <p:cNvCxnSpPr/>
+          <p:nvPr/>
+        </p:nvCxnSpPr>
+        <p:spPr>
+          <a:xfrm>
+            <a:off x="6588224" y="404664"/>
+            <a:ext cx="216024" cy="0"/>
+          </a:xfrm>
+          <a:prstGeom prst="line">
+            <a:avLst/>
+          </a:prstGeom>
+          <a:ln w="22225">
+            <a:solidFill>
+              <a:schemeClr val="accent2"/>
+            </a:solidFill>
+          </a:ln>
+        </p:spPr>
+        <p:style>
+          <a:lnRef idx="1">
+            <a:schemeClr val="accent1"/>
+          </a:lnRef>
+          <a:fillRef idx="0">
+            <a:schemeClr val="accent1"/>
+          </a:fillRef>
+          <a:effectRef idx="0">
+            <a:schemeClr val="accent1"/>
+          </a:effectRef>
+          <a:fontRef idx="minor">
+            <a:schemeClr val="tx1"/>
+          </a:fontRef>
+        </p:style>
+      </p:cxnSp>
+      <p:cxnSp>
+        <p:nvCxnSpPr>
+          <p:cNvPr id="91" name="Conector angulado 90"/>
+          <p:cNvCxnSpPr/>
+          <p:nvPr/>
+        </p:nvCxnSpPr>
+        <p:spPr>
+          <a:xfrm rot="5400000" flipH="1" flipV="1">
+            <a:off x="5835265" y="1093436"/>
+            <a:ext cx="1441731" cy="64188"/>
+          </a:xfrm>
+          <a:prstGeom prst="bentConnector3">
+            <a:avLst>
+              <a:gd name="adj1" fmla="val 100515"/>
+            </a:avLst>
+          </a:prstGeom>
+          <a:ln w="22225">
+            <a:solidFill>
+              <a:schemeClr val="accent2"/>
+            </a:solidFill>
+          </a:ln>
+        </p:spPr>
+        <p:style>
+          <a:lnRef idx="1">
+            <a:schemeClr val="accent1"/>
+          </a:lnRef>
+          <a:fillRef idx="0">
+            <a:schemeClr val="accent1"/>
+          </a:fillRef>
+          <a:effectRef idx="0">
+            <a:schemeClr val="accent1"/>
+          </a:effectRef>
+          <a:fontRef idx="minor">
+            <a:schemeClr val="tx1"/>
+          </a:fontRef>
+        </p:style>
+      </p:cxnSp>
+      <p:cxnSp>
+        <p:nvCxnSpPr>
+          <p:cNvPr id="107" name="Conector angulado 106"/>
+          <p:cNvCxnSpPr/>
+          <p:nvPr/>
+        </p:nvCxnSpPr>
+        <p:spPr>
+          <a:xfrm flipV="1">
+            <a:off x="6156176" y="548680"/>
+            <a:ext cx="648072" cy="576064"/>
+          </a:xfrm>
+          <a:prstGeom prst="bentConnector3">
+            <a:avLst>
+              <a:gd name="adj1" fmla="val 55"/>
+            </a:avLst>
+          </a:prstGeom>
+          <a:ln w="22225">
+            <a:solidFill>
+              <a:schemeClr val="tx1"/>
+            </a:solidFill>
+          </a:ln>
+        </p:spPr>
+        <p:style>
+          <a:lnRef idx="1">
+            <a:schemeClr val="accent1"/>
+          </a:lnRef>
+          <a:fillRef idx="0">
+            <a:schemeClr val="accent1"/>
+          </a:fillRef>
+          <a:effectRef idx="0">
+            <a:schemeClr val="accent1"/>
+          </a:effectRef>
+          <a:fontRef idx="minor">
+            <a:schemeClr val="tx1"/>
+          </a:fontRef>
+        </p:style>
+      </p:cxnSp>
+      <p:cxnSp>
+        <p:nvCxnSpPr>
+          <p:cNvPr id="117" name="Conector reto 116"/>
+          <p:cNvCxnSpPr/>
+          <p:nvPr/>
+        </p:nvCxnSpPr>
+        <p:spPr>
+          <a:xfrm>
+            <a:off x="6516216" y="1268760"/>
+            <a:ext cx="216024" cy="0"/>
+          </a:xfrm>
+          <a:prstGeom prst="line">
+            <a:avLst/>
+          </a:prstGeom>
+          <a:ln w="22225">
+            <a:solidFill>
+              <a:schemeClr val="accent2"/>
+            </a:solidFill>
+          </a:ln>
+        </p:spPr>
+        <p:style>
+          <a:lnRef idx="1">
+            <a:schemeClr val="accent1"/>
+          </a:lnRef>
+          <a:fillRef idx="0">
+            <a:schemeClr val="accent1"/>
+          </a:fillRef>
+          <a:effectRef idx="0">
+            <a:schemeClr val="accent1"/>
+          </a:effectRef>
+          <a:fontRef idx="minor">
+            <a:schemeClr val="tx1"/>
+          </a:fontRef>
+        </p:style>
+      </p:cxnSp>
+      <p:cxnSp>
+        <p:nvCxnSpPr>
+          <p:cNvPr id="118" name="Conector angulado 117"/>
+          <p:cNvCxnSpPr/>
+          <p:nvPr/>
+        </p:nvCxnSpPr>
+        <p:spPr>
+          <a:xfrm rot="5400000" flipH="1" flipV="1">
+            <a:off x="5868144" y="1124744"/>
+            <a:ext cx="1368152" cy="504056"/>
+          </a:xfrm>
+          <a:prstGeom prst="bentConnector3">
+            <a:avLst>
+              <a:gd name="adj1" fmla="val 100274"/>
+            </a:avLst>
+          </a:prstGeom>
+          <a:ln w="22225">
+            <a:solidFill>
+              <a:schemeClr val="accent3">
+                <a:lumMod val="75000"/>
+              </a:schemeClr>
+            </a:solidFill>
+          </a:ln>
+        </p:spPr>
+        <p:style>
+          <a:lnRef idx="1">
+            <a:schemeClr val="accent1"/>
+          </a:lnRef>
+          <a:fillRef idx="0">
+            <a:schemeClr val="accent1"/>
+          </a:fillRef>
+          <a:effectRef idx="0">
+            <a:schemeClr val="accent1"/>
+          </a:effectRef>
+          <a:fontRef idx="minor">
+            <a:schemeClr val="tx1"/>
+          </a:fontRef>
+        </p:style>
+      </p:cxnSp>
+      <p:cxnSp>
+        <p:nvCxnSpPr>
+          <p:cNvPr id="124" name="Conector angulado 123"/>
+          <p:cNvCxnSpPr/>
+          <p:nvPr/>
+        </p:nvCxnSpPr>
+        <p:spPr>
+          <a:xfrm rot="5400000" flipH="1" flipV="1">
+            <a:off x="5940152" y="1340768"/>
+            <a:ext cx="1368152" cy="360040"/>
+          </a:xfrm>
+          <a:prstGeom prst="bentConnector3">
+            <a:avLst>
+              <a:gd name="adj1" fmla="val 100865"/>
+            </a:avLst>
+          </a:prstGeom>
+          <a:ln w="22225">
+            <a:solidFill>
+              <a:schemeClr val="accent3">
+                <a:lumMod val="75000"/>
+              </a:schemeClr>
             </a:solidFill>
           </a:ln>
         </p:spPr>
@@ -18442,7 +18725,6 @@
               <a:rPr lang="pt-BR" dirty="0" smtClean="0"/>
               <a:t>Multiplex i2c </a:t>
             </a:r>
-            <a:endParaRPr lang="pt-BR" dirty="0" smtClean="0"/>
           </a:p>
           <a:p>
             <a:pPr algn="ctr"/>
@@ -22158,7 +22440,6 @@
               <a:rPr lang="pt-BR" dirty="0" smtClean="0"/>
               <a:t>Multiplex </a:t>
             </a:r>
-            <a:endParaRPr lang="pt-BR" dirty="0" smtClean="0"/>
           </a:p>
           <a:p>
             <a:pPr algn="ctr"/>
